--- a/Late_Delivery_Risk_Prediction_in_Global_Supply_Chain_Operations/APL_Logistics_Executive_Presentation.pptx
+++ b/Late_Delivery_Risk_Prediction_in_Global_Supply_Chain_Operations/APL_Logistics_Executive_Presentation.pptx
@@ -311,7 +311,7 @@
               <a:rPr lang="en-US" smtClean="0"/>
               <a:t>7/26/2026</a:t>
             </a:fld>
-            <a:endParaRPr lang="en-US"/>
+            <a:endParaRPr lang="en-US" dirty="0"/>
           </a:p>
         </p:txBody>
       </p:sp>
@@ -330,7 +330,7 @@
           <a:bodyPr/>
           <a:lstStyle/>
           <a:p>
-            <a:endParaRPr lang="en-US"/>
+            <a:endParaRPr lang="en-US" dirty="0"/>
           </a:p>
         </p:txBody>
       </p:sp>
@@ -353,7 +353,7 @@
               <a:rPr lang="en-US" smtClean="0"/>
               <a:t>‹#›</a:t>
             </a:fld>
-            <a:endParaRPr lang="en-US"/>
+            <a:endParaRPr lang="en-US" dirty="0"/>
           </a:p>
         </p:txBody>
       </p:sp>
@@ -479,7 +479,7 @@
               <a:rPr lang="en-US" smtClean="0"/>
               <a:t>7/26/2026</a:t>
             </a:fld>
-            <a:endParaRPr lang="en-US"/>
+            <a:endParaRPr lang="en-US" dirty="0"/>
           </a:p>
         </p:txBody>
       </p:sp>
@@ -498,7 +498,7 @@
           <a:bodyPr/>
           <a:lstStyle/>
           <a:p>
-            <a:endParaRPr lang="en-US"/>
+            <a:endParaRPr lang="en-US" dirty="0"/>
           </a:p>
         </p:txBody>
       </p:sp>
@@ -521,7 +521,7 @@
               <a:rPr lang="en-US" smtClean="0"/>
               <a:t>‹#›</a:t>
             </a:fld>
-            <a:endParaRPr lang="en-US"/>
+            <a:endParaRPr lang="en-US" dirty="0"/>
           </a:p>
         </p:txBody>
       </p:sp>
@@ -657,7 +657,7 @@
               <a:rPr lang="en-US" smtClean="0"/>
               <a:t>7/26/2026</a:t>
             </a:fld>
-            <a:endParaRPr lang="en-US"/>
+            <a:endParaRPr lang="en-US" dirty="0"/>
           </a:p>
         </p:txBody>
       </p:sp>
@@ -676,7 +676,7 @@
           <a:bodyPr/>
           <a:lstStyle/>
           <a:p>
-            <a:endParaRPr lang="en-US"/>
+            <a:endParaRPr lang="en-US" dirty="0"/>
           </a:p>
         </p:txBody>
       </p:sp>
@@ -699,7 +699,7 @@
               <a:rPr lang="en-US" smtClean="0"/>
               <a:t>‹#›</a:t>
             </a:fld>
-            <a:endParaRPr lang="en-US"/>
+            <a:endParaRPr lang="en-US" dirty="0"/>
           </a:p>
         </p:txBody>
       </p:sp>
@@ -825,7 +825,7 @@
               <a:rPr lang="en-US" smtClean="0"/>
               <a:t>7/26/2026</a:t>
             </a:fld>
-            <a:endParaRPr lang="en-US"/>
+            <a:endParaRPr lang="en-US" dirty="0"/>
           </a:p>
         </p:txBody>
       </p:sp>
@@ -844,7 +844,7 @@
           <a:bodyPr/>
           <a:lstStyle/>
           <a:p>
-            <a:endParaRPr lang="en-US"/>
+            <a:endParaRPr lang="en-US" dirty="0"/>
           </a:p>
         </p:txBody>
       </p:sp>
@@ -867,7 +867,7 @@
               <a:rPr lang="en-US" smtClean="0"/>
               <a:t>‹#›</a:t>
             </a:fld>
-            <a:endParaRPr lang="en-US"/>
+            <a:endParaRPr lang="en-US" dirty="0"/>
           </a:p>
         </p:txBody>
       </p:sp>
@@ -1070,7 +1070,7 @@
               <a:rPr lang="en-US" smtClean="0"/>
               <a:t>7/26/2026</a:t>
             </a:fld>
-            <a:endParaRPr lang="en-US"/>
+            <a:endParaRPr lang="en-US" dirty="0"/>
           </a:p>
         </p:txBody>
       </p:sp>
@@ -1089,7 +1089,7 @@
           <a:bodyPr/>
           <a:lstStyle/>
           <a:p>
-            <a:endParaRPr lang="en-US"/>
+            <a:endParaRPr lang="en-US" dirty="0"/>
           </a:p>
         </p:txBody>
       </p:sp>
@@ -1112,7 +1112,7 @@
               <a:rPr lang="en-US" smtClean="0"/>
               <a:t>‹#›</a:t>
             </a:fld>
-            <a:endParaRPr lang="en-US"/>
+            <a:endParaRPr lang="en-US" dirty="0"/>
           </a:p>
         </p:txBody>
       </p:sp>
@@ -1355,7 +1355,7 @@
               <a:rPr lang="en-US" smtClean="0"/>
               <a:t>7/26/2026</a:t>
             </a:fld>
-            <a:endParaRPr lang="en-US"/>
+            <a:endParaRPr lang="en-US" dirty="0"/>
           </a:p>
         </p:txBody>
       </p:sp>
@@ -1374,7 +1374,7 @@
           <a:bodyPr/>
           <a:lstStyle/>
           <a:p>
-            <a:endParaRPr lang="en-US"/>
+            <a:endParaRPr lang="en-US" dirty="0"/>
           </a:p>
         </p:txBody>
       </p:sp>
@@ -1397,7 +1397,7 @@
               <a:rPr lang="en-US" smtClean="0"/>
               <a:t>‹#›</a:t>
             </a:fld>
-            <a:endParaRPr lang="en-US"/>
+            <a:endParaRPr lang="en-US" dirty="0"/>
           </a:p>
         </p:txBody>
       </p:sp>
@@ -1774,7 +1774,7 @@
               <a:rPr lang="en-US" smtClean="0"/>
               <a:t>7/26/2026</a:t>
             </a:fld>
-            <a:endParaRPr lang="en-US"/>
+            <a:endParaRPr lang="en-US" dirty="0"/>
           </a:p>
         </p:txBody>
       </p:sp>
@@ -1793,7 +1793,7 @@
           <a:bodyPr/>
           <a:lstStyle/>
           <a:p>
-            <a:endParaRPr lang="en-US"/>
+            <a:endParaRPr lang="en-US" dirty="0"/>
           </a:p>
         </p:txBody>
       </p:sp>
@@ -1816,7 +1816,7 @@
               <a:rPr lang="en-US" smtClean="0"/>
               <a:t>‹#›</a:t>
             </a:fld>
-            <a:endParaRPr lang="en-US"/>
+            <a:endParaRPr lang="en-US" dirty="0"/>
           </a:p>
         </p:txBody>
       </p:sp>
@@ -1891,7 +1891,7 @@
               <a:rPr lang="en-US" smtClean="0"/>
               <a:t>7/26/2026</a:t>
             </a:fld>
-            <a:endParaRPr lang="en-US"/>
+            <a:endParaRPr lang="en-US" dirty="0"/>
           </a:p>
         </p:txBody>
       </p:sp>
@@ -1910,7 +1910,7 @@
           <a:bodyPr/>
           <a:lstStyle/>
           <a:p>
-            <a:endParaRPr lang="en-US"/>
+            <a:endParaRPr lang="en-US" dirty="0"/>
           </a:p>
         </p:txBody>
       </p:sp>
@@ -1933,7 +1933,7 @@
               <a:rPr lang="en-US" smtClean="0"/>
               <a:t>‹#›</a:t>
             </a:fld>
-            <a:endParaRPr lang="en-US"/>
+            <a:endParaRPr lang="en-US" dirty="0"/>
           </a:p>
         </p:txBody>
       </p:sp>
@@ -1986,7 +1986,7 @@
               <a:rPr lang="en-US" smtClean="0"/>
               <a:t>7/26/2026</a:t>
             </a:fld>
-            <a:endParaRPr lang="en-US"/>
+            <a:endParaRPr lang="en-US" dirty="0"/>
           </a:p>
         </p:txBody>
       </p:sp>
@@ -2005,7 +2005,7 @@
           <a:bodyPr/>
           <a:lstStyle/>
           <a:p>
-            <a:endParaRPr lang="en-US"/>
+            <a:endParaRPr lang="en-US" dirty="0"/>
           </a:p>
         </p:txBody>
       </p:sp>
@@ -2028,7 +2028,7 @@
               <a:rPr lang="en-US" smtClean="0"/>
               <a:t>‹#›</a:t>
             </a:fld>
-            <a:endParaRPr lang="en-US"/>
+            <a:endParaRPr lang="en-US" dirty="0"/>
           </a:p>
         </p:txBody>
       </p:sp>
@@ -2261,7 +2261,7 @@
               <a:rPr lang="en-US" smtClean="0"/>
               <a:t>7/26/2026</a:t>
             </a:fld>
-            <a:endParaRPr lang="en-US"/>
+            <a:endParaRPr lang="en-US" dirty="0"/>
           </a:p>
         </p:txBody>
       </p:sp>
@@ -2280,7 +2280,7 @@
           <a:bodyPr/>
           <a:lstStyle/>
           <a:p>
-            <a:endParaRPr lang="en-US"/>
+            <a:endParaRPr lang="en-US" dirty="0"/>
           </a:p>
         </p:txBody>
       </p:sp>
@@ -2303,7 +2303,7 @@
               <a:rPr lang="en-US" smtClean="0"/>
               <a:t>‹#›</a:t>
             </a:fld>
-            <a:endParaRPr lang="en-US"/>
+            <a:endParaRPr lang="en-US" dirty="0"/>
           </a:p>
         </p:txBody>
       </p:sp>
@@ -2425,7 +2425,7 @@
             </a:lvl9pPr>
           </a:lstStyle>
           <a:p>
-            <a:endParaRPr lang="en-US"/>
+            <a:endParaRPr lang="en-US" dirty="0"/>
           </a:p>
         </p:txBody>
       </p:sp>
@@ -2513,7 +2513,7 @@
               <a:rPr lang="en-US" smtClean="0"/>
               <a:t>7/26/2026</a:t>
             </a:fld>
-            <a:endParaRPr lang="en-US"/>
+            <a:endParaRPr lang="en-US" dirty="0"/>
           </a:p>
         </p:txBody>
       </p:sp>
@@ -2532,7 +2532,7 @@
           <a:bodyPr/>
           <a:lstStyle/>
           <a:p>
-            <a:endParaRPr lang="en-US"/>
+            <a:endParaRPr lang="en-US" dirty="0"/>
           </a:p>
         </p:txBody>
       </p:sp>
@@ -2555,7 +2555,7 @@
               <a:rPr lang="en-US" smtClean="0"/>
               <a:t>‹#›</a:t>
             </a:fld>
-            <a:endParaRPr lang="en-US"/>
+            <a:endParaRPr lang="en-US" dirty="0"/>
           </a:p>
         </p:txBody>
       </p:sp>
@@ -2724,7 +2724,7 @@
               <a:rPr lang="en-US" smtClean="0"/>
               <a:t>7/26/2026</a:t>
             </a:fld>
-            <a:endParaRPr lang="en-US"/>
+            <a:endParaRPr lang="en-US" dirty="0"/>
           </a:p>
         </p:txBody>
       </p:sp>
@@ -2761,7 +2761,7 @@
             </a:lvl1pPr>
           </a:lstStyle>
           <a:p>
-            <a:endParaRPr lang="en-US"/>
+            <a:endParaRPr lang="en-US" dirty="0"/>
           </a:p>
         </p:txBody>
       </p:sp>
@@ -2802,7 +2802,7 @@
               <a:rPr lang="en-US" smtClean="0"/>
               <a:t>‹#›</a:t>
             </a:fld>
-            <a:endParaRPr lang="en-US"/>
+            <a:endParaRPr lang="en-US" dirty="0"/>
           </a:p>
         </p:txBody>
       </p:sp>
@@ -3336,7 +3336,7 @@
           <a:lstStyle/>
           <a:p>
             <a:pPr algn="ctr"/>
-            <a:endParaRPr/>
+            <a:endParaRPr dirty="0"/>
           </a:p>
         </p:txBody>
       </p:sp>
@@ -3371,6 +3371,7 @@
               </a:defRPr>
             </a:pPr>
             <a:r>
+              <a:rPr dirty="0"/>
               <a:t>Executive Overview &amp; Problem Statement</a:t>
             </a:r>
           </a:p>
@@ -3407,6 +3408,7 @@
               </a:defRPr>
             </a:pPr>
             <a:r>
+              <a:rPr dirty="0"/>
               <a:t>Proactive Late Delivery Risk Mitigation in Global Freight Operations</a:t>
             </a:r>
           </a:p>
@@ -3456,7 +3458,7 @@
           <a:lstStyle/>
           <a:p>
             <a:pPr algn="ctr"/>
-            <a:endParaRPr/>
+            <a:endParaRPr dirty="0"/>
           </a:p>
         </p:txBody>
       </p:sp>
@@ -3612,7 +3614,7 @@
           <a:lstStyle/>
           <a:p>
             <a:pPr algn="ctr"/>
-            <a:endParaRPr/>
+            <a:endParaRPr dirty="0"/>
           </a:p>
         </p:txBody>
       </p:sp>
@@ -3650,6 +3652,7 @@
               </a:defRPr>
             </a:pPr>
             <a:r>
+              <a:rPr dirty="0"/>
               <a:t>Proposed Data Science &amp; AI Solution</a:t>
             </a:r>
           </a:p>
@@ -3666,6 +3669,7 @@
               </a:defRPr>
             </a:pPr>
             <a:r>
+              <a:rPr dirty="0"/>
               <a:t>• Predictive Machine Learning Engine analyzing 180,000+ global transaction records.</a:t>
             </a:r>
           </a:p>
@@ -3682,7 +3686,16 @@
               </a:defRPr>
             </a:pPr>
             <a:r>
-              <a:t>• Automated Hyperparameter Optimization via Optuna for max classification accuracy.</a:t>
+              <a:rPr dirty="0"/>
+              <a:t>• Automated Hyperparameter Optimization via </a:t>
+            </a:r>
+            <a:r>
+              <a:rPr dirty="0" err="1"/>
+              <a:t>Optuna</a:t>
+            </a:r>
+            <a:r>
+              <a:rPr dirty="0"/>
+              <a:t> for max classification accuracy.</a:t>
             </a:r>
           </a:p>
           <a:p>
@@ -3698,6 +3711,7 @@
               </a:defRPr>
             </a:pPr>
             <a:r>
+              <a:rPr dirty="0"/>
               <a:t>• Target Encoding for high-cardinality geographic &amp; product variables.</a:t>
             </a:r>
           </a:p>
@@ -3714,7 +3728,16 @@
               </a:defRPr>
             </a:pPr>
             <a:r>
-              <a:t>• Two-Tier Deployment: Streamlit Predictor App + Executive Power BI Dashboards.</a:t>
+              <a:rPr dirty="0"/>
+              <a:t>• Two-Tier Deployment: </a:t>
+            </a:r>
+            <a:r>
+              <a:rPr dirty="0" err="1"/>
+              <a:t>Streamlit</a:t>
+            </a:r>
+            <a:r>
+              <a:rPr dirty="0"/>
+              <a:t> Predictor App + Executive Power BI Dashboards.</a:t>
             </a:r>
           </a:p>
         </p:txBody>
@@ -3794,7 +3817,7 @@
           <a:lstStyle/>
           <a:p>
             <a:pPr algn="ctr"/>
-            <a:endParaRPr/>
+            <a:endParaRPr dirty="0"/>
           </a:p>
         </p:txBody>
       </p:sp>
@@ -3829,6 +3852,7 @@
               </a:defRPr>
             </a:pPr>
             <a:r>
+              <a:rPr dirty="0"/>
               <a:t>Power BI Visual Dashboard: Page 1 (Sales &amp; Discounts)</a:t>
             </a:r>
           </a:p>
@@ -3865,6 +3889,7 @@
               </a:defRPr>
             </a:pPr>
             <a:r>
+              <a:rPr dirty="0"/>
               <a:t>Embedded Visual Presentations from Power BI Data Model</a:t>
             </a:r>
           </a:p>
@@ -3984,7 +4009,7 @@
           <a:lstStyle/>
           <a:p>
             <a:pPr algn="ctr"/>
-            <a:endParaRPr/>
+            <a:endParaRPr dirty="0"/>
           </a:p>
         </p:txBody>
       </p:sp>
@@ -4137,7 +4162,7 @@
           <a:lstStyle/>
           <a:p>
             <a:pPr algn="ctr"/>
-            <a:endParaRPr/>
+            <a:endParaRPr dirty="0"/>
           </a:p>
         </p:txBody>
       </p:sp>
@@ -4172,6 +4197,7 @@
               </a:defRPr>
             </a:pPr>
             <a:r>
+              <a:rPr dirty="0"/>
               <a:t>Power BI Visual Dashboard: Page 2 (Delivery Performance)</a:t>
             </a:r>
           </a:p>
@@ -4208,6 +4234,7 @@
               </a:defRPr>
             </a:pPr>
             <a:r>
+              <a:rPr dirty="0"/>
               <a:t>Embedded Fulfillment Status &amp; Price Segment Visualizations</a:t>
             </a:r>
           </a:p>
@@ -4305,7 +4332,7 @@
           <a:lstStyle/>
           <a:p>
             <a:pPr algn="ctr"/>
-            <a:endParaRPr/>
+            <a:endParaRPr dirty="0"/>
           </a:p>
         </p:txBody>
       </p:sp>
@@ -4343,6 +4370,7 @@
               </a:defRPr>
             </a:pPr>
             <a:r>
+              <a:rPr dirty="0"/>
               <a:t>Operational Insights</a:t>
             </a:r>
           </a:p>
@@ -4359,6 +4387,7 @@
               </a:defRPr>
             </a:pPr>
             <a:r>
+              <a:rPr dirty="0"/>
               <a:t>• Delivery Status Breakdown: Highlights high proportion of Late Deliveries requiring proactive early-warning routing.</a:t>
             </a:r>
           </a:p>
@@ -4375,6 +4404,7 @@
               </a:defRPr>
             </a:pPr>
             <a:r>
+              <a:rPr dirty="0"/>
               <a:t>• Revenue Exposure: High price segment shipments represent elevated financial risk under SLA delay penalties.</a:t>
             </a:r>
           </a:p>
@@ -4455,7 +4485,7 @@
           <a:lstStyle/>
           <a:p>
             <a:pPr algn="ctr"/>
-            <a:endParaRPr/>
+            <a:endParaRPr dirty="0"/>
           </a:p>
         </p:txBody>
       </p:sp>
@@ -4490,7 +4520,16 @@
               </a:defRPr>
             </a:pPr>
             <a:r>
-              <a:t>Machine Learning Framework &amp; Optuna Optimization</a:t>
+              <a:rPr dirty="0"/>
+              <a:t>Machine Learning Framework &amp; </a:t>
+            </a:r>
+            <a:r>
+              <a:rPr dirty="0" err="1"/>
+              <a:t>Optuna</a:t>
+            </a:r>
+            <a:r>
+              <a:rPr dirty="0"/>
+              <a:t> Optimization</a:t>
             </a:r>
           </a:p>
         </p:txBody>
@@ -4526,6 +4565,7 @@
               </a:defRPr>
             </a:pPr>
             <a:r>
+              <a:rPr dirty="0"/>
               <a:t>Multi-Model Evaluation &amp; Automated Hyperparameter Optimization</a:t>
             </a:r>
           </a:p>
@@ -4575,7 +4615,7 @@
           <a:lstStyle/>
           <a:p>
             <a:pPr algn="ctr"/>
-            <a:endParaRPr/>
+            <a:endParaRPr dirty="0"/>
           </a:p>
         </p:txBody>
       </p:sp>
@@ -4613,6 +4653,7 @@
               </a:defRPr>
             </a:pPr>
             <a:r>
+              <a:rPr dirty="0"/>
               <a:t>Model Selection &amp; Pipeline</a:t>
             </a:r>
           </a:p>
@@ -4629,7 +4670,16 @@
               </a:defRPr>
             </a:pPr>
             <a:r>
-              <a:t>• Evaluated Classifiers: Logistic Regression, Random Forest, XGBoost, and Gradient Boosting.</a:t>
+              <a:rPr dirty="0"/>
+              <a:t>• Evaluated Classifiers: Logistic Regression, Random Forest, </a:t>
+            </a:r>
+            <a:r>
+              <a:rPr dirty="0" err="1"/>
+              <a:t>XGBoost</a:t>
+            </a:r>
+            <a:r>
+              <a:rPr dirty="0"/>
+              <a:t>, and Gradient Boosting.</a:t>
             </a:r>
           </a:p>
           <a:p>
@@ -4645,6 +4695,7 @@
               </a:defRPr>
             </a:pPr>
             <a:r>
+              <a:rPr dirty="0"/>
               <a:t>• Cross-Validation: 5-Fold Stratified CV preserving target class distributions.</a:t>
             </a:r>
           </a:p>
@@ -4661,6 +4712,7 @@
               </a:defRPr>
             </a:pPr>
             <a:r>
+              <a:rPr dirty="0"/>
               <a:t>• Target Encoding: Transformed 15 high-cardinality categorical features (Cities, States, Markets, Shipping Modes).</a:t>
             </a:r>
           </a:p>
@@ -4710,7 +4762,7 @@
           <a:lstStyle/>
           <a:p>
             <a:pPr algn="ctr"/>
-            <a:endParaRPr/>
+            <a:endParaRPr dirty="0"/>
           </a:p>
         </p:txBody>
       </p:sp>
@@ -4748,7 +4800,12 @@
               </a:defRPr>
             </a:pPr>
             <a:r>
-              <a:t>Optuna Hyperparameter Tuning</a:t>
+              <a:rPr dirty="0" err="1"/>
+              <a:t>Optuna</a:t>
+            </a:r>
+            <a:r>
+              <a:rPr dirty="0"/>
+              <a:t> Hyperparameter Tuning</a:t>
             </a:r>
           </a:p>
           <a:p>
@@ -4764,7 +4821,16 @@
               </a:defRPr>
             </a:pPr>
             <a:r>
-              <a:t>• Optimization Engine: Tree-structured Parzen Estimator (TPE) algorithm.</a:t>
+              <a:rPr dirty="0"/>
+              <a:t>• Optimization Engine: Tree-structured </a:t>
+            </a:r>
+            <a:r>
+              <a:rPr dirty="0" err="1"/>
+              <a:t>Parzen</a:t>
+            </a:r>
+            <a:r>
+              <a:rPr dirty="0"/>
+              <a:t> Estimator (TPE) algorithm.</a:t>
             </a:r>
           </a:p>
           <a:p>
@@ -4780,6 +4846,7 @@
               </a:defRPr>
             </a:pPr>
             <a:r>
+              <a:rPr dirty="0"/>
               <a:t>• Best Model Selected: Gradient Boosting Classifier (138 Estimators, Max Depth 10, Learning Rate 0.0153).</a:t>
             </a:r>
           </a:p>
@@ -4796,6 +4863,7 @@
               </a:defRPr>
             </a:pPr>
             <a:r>
+              <a:rPr dirty="0"/>
               <a:t>• Performance: Achieved state-of-the-art ROC-AUC classification capability.</a:t>
             </a:r>
           </a:p>
@@ -4876,7 +4944,7 @@
           <a:lstStyle/>
           <a:p>
             <a:pPr algn="ctr"/>
-            <a:endParaRPr/>
+            <a:endParaRPr dirty="0"/>
           </a:p>
         </p:txBody>
       </p:sp>
@@ -4911,6 +4979,7 @@
               </a:defRPr>
             </a:pPr>
             <a:r>
+              <a:rPr dirty="0"/>
               <a:t>Critical Finding: Target Leakage &amp; Real Pre-Shipment Drivers</a:t>
             </a:r>
           </a:p>
@@ -4947,6 +5016,7 @@
               </a:defRPr>
             </a:pPr>
             <a:r>
+              <a:rPr dirty="0"/>
               <a:t>Distinguishing Post-Facto Status Indicators from Early Warning Signals</a:t>
             </a:r>
           </a:p>
@@ -4996,7 +5066,7 @@
           <a:lstStyle/>
           <a:p>
             <a:pPr algn="ctr"/>
-            <a:endParaRPr/>
+            <a:endParaRPr dirty="0"/>
           </a:p>
         </p:txBody>
       </p:sp>
@@ -5034,6 +5104,7 @@
               </a:defRPr>
             </a:pPr>
             <a:r>
+              <a:rPr dirty="0"/>
               <a:t>The Data Leakage Finding</a:t>
             </a:r>
           </a:p>
@@ -5050,6 +5121,7 @@
               </a:defRPr>
             </a:pPr>
             <a:r>
+              <a:rPr dirty="0"/>
               <a:t>• Feature Importance Audit: Delivery Status accounts for 86.40% of baseline model predictive weight.</a:t>
             </a:r>
           </a:p>
@@ -5066,6 +5138,7 @@
               </a:defRPr>
             </a:pPr>
             <a:r>
+              <a:rPr dirty="0"/>
               <a:t>• Operational Conflict: Delivery Status is populated dynamically during transit (post-facto indicator).</a:t>
             </a:r>
           </a:p>
@@ -5082,6 +5155,7 @@
               </a:defRPr>
             </a:pPr>
             <a:r>
+              <a:rPr dirty="0"/>
               <a:t>• Key Correction: Excluding Delivery Status ensures the model operates strictly on pre-shipment data.</a:t>
             </a:r>
           </a:p>
@@ -5131,7 +5205,7 @@
           <a:lstStyle/>
           <a:p>
             <a:pPr algn="ctr"/>
-            <a:endParaRPr/>
+            <a:endParaRPr dirty="0"/>
           </a:p>
         </p:txBody>
       </p:sp>
@@ -5169,6 +5243,7 @@
               </a:defRPr>
             </a:pPr>
             <a:r>
+              <a:rPr dirty="0"/>
               <a:t>True Pre-Shipment Risk Drivers</a:t>
             </a:r>
           </a:p>
@@ -5185,6 +5260,7 @@
               </a:defRPr>
             </a:pPr>
             <a:r>
+              <a:rPr dirty="0"/>
               <a:t>• Scheduled Shipment Days (5.89%): Tight delivery windows directly increase delay probability.</a:t>
             </a:r>
           </a:p>
@@ -5201,6 +5277,7 @@
               </a:defRPr>
             </a:pPr>
             <a:r>
+              <a:rPr dirty="0"/>
               <a:t>• Shipping Mode (5.77%): Standard vs Express shipping mode constraints.</a:t>
             </a:r>
           </a:p>
@@ -5217,6 +5294,7 @@
               </a:defRPr>
             </a:pPr>
             <a:r>
+              <a:rPr dirty="0"/>
               <a:t>• Destination City &amp; Geography (1.09%): Destination congestion and regional transit complexities.</a:t>
             </a:r>
           </a:p>
@@ -5233,6 +5311,7 @@
               </a:defRPr>
             </a:pPr>
             <a:r>
+              <a:rPr dirty="0"/>
               <a:t>• Payment &amp; Financial Metrics: Payment method, order price, and customer demographics.</a:t>
             </a:r>
           </a:p>
@@ -5313,7 +5392,7 @@
           <a:lstStyle/>
           <a:p>
             <a:pPr algn="ctr"/>
-            <a:endParaRPr/>
+            <a:endParaRPr dirty="0"/>
           </a:p>
         </p:txBody>
       </p:sp>
@@ -5348,6 +5427,7 @@
               </a:defRPr>
             </a:pPr>
             <a:r>
+              <a:rPr dirty="0"/>
               <a:t>Operational Deployment Architecture</a:t>
             </a:r>
           </a:p>
@@ -5384,6 +5464,7 @@
               </a:defRPr>
             </a:pPr>
             <a:r>
+              <a:rPr dirty="0"/>
               <a:t>Bridging Data Science Models to Daily Supply Chain Workflows</a:t>
             </a:r>
           </a:p>
@@ -5433,7 +5514,7 @@
           <a:lstStyle/>
           <a:p>
             <a:pPr algn="ctr"/>
-            <a:endParaRPr/>
+            <a:endParaRPr dirty="0"/>
           </a:p>
         </p:txBody>
       </p:sp>
@@ -5471,7 +5552,16 @@
               </a:defRPr>
             </a:pPr>
             <a:r>
-              <a:t>Tier 1: Streamlit Real-Time Predictor App</a:t>
+              <a:rPr dirty="0"/>
+              <a:t>Tier 1: </a:t>
+            </a:r>
+            <a:r>
+              <a:rPr dirty="0" err="1"/>
+              <a:t>Streamlit</a:t>
+            </a:r>
+            <a:r>
+              <a:rPr dirty="0"/>
+              <a:t> Real-Time Predictor App</a:t>
             </a:r>
           </a:p>
           <a:p>
@@ -5487,6 +5577,7 @@
               </a:defRPr>
             </a:pPr>
             <a:r>
+              <a:rPr dirty="0"/>
               <a:t>• Interactive Web Interface: Tabbed UI (Shipment, Financials, Customer Demographics, Destination).</a:t>
             </a:r>
           </a:p>
@@ -5503,6 +5594,7 @@
               </a:defRPr>
             </a:pPr>
             <a:r>
+              <a:rPr dirty="0"/>
               <a:t>• Real-Time Risk Scoring: Planners input order parameters and receive instant late probability %.</a:t>
             </a:r>
           </a:p>
@@ -5519,6 +5611,7 @@
               </a:defRPr>
             </a:pPr>
             <a:r>
+              <a:rPr dirty="0"/>
               <a:t>• Operational Alerts: Color-coded High Risk vs Low Risk indicators for immediate decision support.</a:t>
             </a:r>
           </a:p>
@@ -5568,7 +5661,7 @@
           <a:lstStyle/>
           <a:p>
             <a:pPr algn="ctr"/>
-            <a:endParaRPr/>
+            <a:endParaRPr dirty="0"/>
           </a:p>
         </p:txBody>
       </p:sp>
@@ -5606,6 +5699,7 @@
               </a:defRPr>
             </a:pPr>
             <a:r>
+              <a:rPr dirty="0"/>
               <a:t>Tier 2: Power BI Executive Dashboard</a:t>
             </a:r>
           </a:p>
@@ -5622,6 +5716,7 @@
               </a:defRPr>
             </a:pPr>
             <a:r>
+              <a:rPr dirty="0"/>
               <a:t>• Strategic Analytics: 3-page interactive visual report connected to supply chain data model.</a:t>
             </a:r>
           </a:p>
@@ -5638,6 +5733,7 @@
               </a:defRPr>
             </a:pPr>
             <a:r>
+              <a:rPr dirty="0"/>
               <a:t>• Regional Trend Tracking: Monitoring revenue exposure and shipping delays across global markets.</a:t>
             </a:r>
           </a:p>
@@ -5654,6 +5750,7 @@
               </a:defRPr>
             </a:pPr>
             <a:r>
+              <a:rPr dirty="0"/>
               <a:t>• Executive Reporting: Dynamic filtering by department, category, and fulfillment status.</a:t>
             </a:r>
           </a:p>
@@ -5734,7 +5831,7 @@
           <a:lstStyle/>
           <a:p>
             <a:pPr algn="ctr"/>
-            <a:endParaRPr/>
+            <a:endParaRPr dirty="0"/>
           </a:p>
         </p:txBody>
       </p:sp>
@@ -5769,6 +5866,7 @@
               </a:defRPr>
             </a:pPr>
             <a:r>
+              <a:rPr dirty="0"/>
               <a:t>Summary &amp; Strategic Recommendations</a:t>
             </a:r>
           </a:p>
@@ -5805,6 +5903,7 @@
               </a:defRPr>
             </a:pPr>
             <a:r>
+              <a:rPr dirty="0"/>
               <a:t>Action Plan for APL Logistics Operational Excellence</a:t>
             </a:r>
           </a:p>
@@ -5854,7 +5953,7 @@
           <a:lstStyle/>
           <a:p>
             <a:pPr algn="ctr"/>
-            <a:endParaRPr/>
+            <a:endParaRPr dirty="0"/>
           </a:p>
         </p:txBody>
       </p:sp>
@@ -5892,6 +5991,7 @@
               </a:defRPr>
             </a:pPr>
             <a:r>
+              <a:rPr dirty="0"/>
               <a:t>Key Takeaways &amp; Action Items</a:t>
             </a:r>
           </a:p>
@@ -5908,6 +6008,7 @@
               </a:defRPr>
             </a:pPr>
             <a:r>
+              <a:rPr dirty="0"/>
               <a:t>• Proactive Early Warning: Deploy the leak-free Gradient Boosting model within daily dispatch workflows.</a:t>
             </a:r>
           </a:p>
@@ -5924,6 +6025,7 @@
               </a:defRPr>
             </a:pPr>
             <a:r>
+              <a:rPr dirty="0"/>
               <a:t>• Surge Capacity Planning: Prioritize express carrier allocations for High Risk predictions in long-haul destination cities.</a:t>
             </a:r>
           </a:p>
@@ -5940,7 +6042,16 @@
               </a:defRPr>
             </a:pPr>
             <a:r>
-              <a:t>• Integration Roadmap: Connect Streamlit prediction endpoints directly to enterprise ERP / WMS systems.</a:t>
+              <a:rPr dirty="0"/>
+              <a:t>• Integration Roadmap: Connect </a:t>
+            </a:r>
+            <a:r>
+              <a:rPr dirty="0" err="1"/>
+              <a:t>Streamlit</a:t>
+            </a:r>
+            <a:r>
+              <a:rPr dirty="0"/>
+              <a:t> prediction endpoints directly to enterprise ERP / WMS systems.</a:t>
             </a:r>
           </a:p>
           <a:p>
@@ -5956,6 +6067,7 @@
               </a:defRPr>
             </a:pPr>
             <a:r>
+              <a:rPr dirty="0"/>
               <a:t>• Future Enhancements: Integrate real-time IoT GPS tracking, weather forecasts, and port congestion feeds.</a:t>
             </a:r>
           </a:p>
